--- a/presentation/Создание доверенной среды на архитектуре RISC-V — копия.pptx
+++ b/presentation/Создание доверенной среды на архитектуре RISC-V — копия.pptx
@@ -891,7 +891,7 @@
           <a:p>
             <a:fld id="{C5FC5BB6-E958-4009-A969-F047C08157FA}" type="datetimeFigureOut">
               <a:rPr lang="ru-RU" smtClean="0"/>
-              <a:t>07.10.2025</a:t>
+              <a:t>23.03.2026</a:t>
             </a:fld>
             <a:endParaRPr lang="ru-RU"/>
           </a:p>
@@ -1089,7 +1089,7 @@
           <a:p>
             <a:fld id="{C5FC5BB6-E958-4009-A969-F047C08157FA}" type="datetimeFigureOut">
               <a:rPr lang="ru-RU" smtClean="0"/>
-              <a:t>07.10.2025</a:t>
+              <a:t>23.03.2026</a:t>
             </a:fld>
             <a:endParaRPr lang="ru-RU"/>
           </a:p>
@@ -1297,7 +1297,7 @@
           <a:p>
             <a:fld id="{C5FC5BB6-E958-4009-A969-F047C08157FA}" type="datetimeFigureOut">
               <a:rPr lang="ru-RU" smtClean="0"/>
-              <a:t>07.10.2025</a:t>
+              <a:t>23.03.2026</a:t>
             </a:fld>
             <a:endParaRPr lang="ru-RU"/>
           </a:p>
@@ -1495,7 +1495,7 @@
           <a:p>
             <a:fld id="{C5FC5BB6-E958-4009-A969-F047C08157FA}" type="datetimeFigureOut">
               <a:rPr lang="ru-RU" smtClean="0"/>
-              <a:t>07.10.2025</a:t>
+              <a:t>23.03.2026</a:t>
             </a:fld>
             <a:endParaRPr lang="ru-RU"/>
           </a:p>
@@ -1770,7 +1770,7 @@
           <a:p>
             <a:fld id="{C5FC5BB6-E958-4009-A969-F047C08157FA}" type="datetimeFigureOut">
               <a:rPr lang="ru-RU" smtClean="0"/>
-              <a:t>07.10.2025</a:t>
+              <a:t>23.03.2026</a:t>
             </a:fld>
             <a:endParaRPr lang="ru-RU"/>
           </a:p>
@@ -2035,7 +2035,7 @@
           <a:p>
             <a:fld id="{C5FC5BB6-E958-4009-A969-F047C08157FA}" type="datetimeFigureOut">
               <a:rPr lang="ru-RU" smtClean="0"/>
-              <a:t>07.10.2025</a:t>
+              <a:t>23.03.2026</a:t>
             </a:fld>
             <a:endParaRPr lang="ru-RU"/>
           </a:p>
@@ -2447,7 +2447,7 @@
           <a:p>
             <a:fld id="{C5FC5BB6-E958-4009-A969-F047C08157FA}" type="datetimeFigureOut">
               <a:rPr lang="ru-RU" smtClean="0"/>
-              <a:t>07.10.2025</a:t>
+              <a:t>23.03.2026</a:t>
             </a:fld>
             <a:endParaRPr lang="ru-RU"/>
           </a:p>
@@ -2588,7 +2588,7 @@
           <a:p>
             <a:fld id="{C5FC5BB6-E958-4009-A969-F047C08157FA}" type="datetimeFigureOut">
               <a:rPr lang="ru-RU" smtClean="0"/>
-              <a:t>07.10.2025</a:t>
+              <a:t>23.03.2026</a:t>
             </a:fld>
             <a:endParaRPr lang="ru-RU"/>
           </a:p>
@@ -2701,7 +2701,7 @@
           <a:p>
             <a:fld id="{C5FC5BB6-E958-4009-A969-F047C08157FA}" type="datetimeFigureOut">
               <a:rPr lang="ru-RU" smtClean="0"/>
-              <a:t>07.10.2025</a:t>
+              <a:t>23.03.2026</a:t>
             </a:fld>
             <a:endParaRPr lang="ru-RU"/>
           </a:p>
@@ -3012,7 +3012,7 @@
           <a:p>
             <a:fld id="{C5FC5BB6-E958-4009-A969-F047C08157FA}" type="datetimeFigureOut">
               <a:rPr lang="ru-RU" smtClean="0"/>
-              <a:t>07.10.2025</a:t>
+              <a:t>23.03.2026</a:t>
             </a:fld>
             <a:endParaRPr lang="ru-RU"/>
           </a:p>
@@ -3300,7 +3300,7 @@
           <a:p>
             <a:fld id="{C5FC5BB6-E958-4009-A969-F047C08157FA}" type="datetimeFigureOut">
               <a:rPr lang="ru-RU" smtClean="0"/>
-              <a:t>07.10.2025</a:t>
+              <a:t>23.03.2026</a:t>
             </a:fld>
             <a:endParaRPr lang="ru-RU"/>
           </a:p>
@@ -3541,7 +3541,7 @@
           <a:p>
             <a:fld id="{C5FC5BB6-E958-4009-A969-F047C08157FA}" type="datetimeFigureOut">
               <a:rPr lang="ru-RU" smtClean="0"/>
-              <a:t>07.10.2025</a:t>
+              <a:t>23.03.2026</a:t>
             </a:fld>
             <a:endParaRPr lang="ru-RU"/>
           </a:p>
@@ -3984,8 +3984,8 @@
         </p:nvSpPr>
         <p:spPr>
           <a:xfrm>
-            <a:off x="1523999" y="2235200"/>
-            <a:ext cx="9144000" cy="2387600"/>
+            <a:off x="1523999" y="1292087"/>
+            <a:ext cx="9144000" cy="3668643"/>
           </a:xfrm>
         </p:spPr>
         <p:txBody>
@@ -3999,6 +3999,27 @@
                 <a:spcPct val="100000"/>
               </a:lnSpc>
             </a:pPr>
+            <a:r>
+              <a:rPr lang="en-US" dirty="0">
+                <a:solidFill>
+                  <a:srgbClr val="C9D1D9"/>
+                </a:solidFill>
+                <a:latin typeface="Inter Semi Bold" panose="02000703000000020004" pitchFamily="50" charset="0"/>
+                <a:ea typeface="Inter Semi Bold" panose="02000703000000020004" pitchFamily="50" charset="0"/>
+                <a:cs typeface="Inter Semi Bold" panose="02000703000000020004" pitchFamily="50" charset="0"/>
+              </a:rPr>
+              <a:t>MVP</a:t>
+            </a:r>
+            <a:br>
+              <a:rPr lang="en-US" dirty="0">
+                <a:solidFill>
+                  <a:srgbClr val="C9D1D9"/>
+                </a:solidFill>
+                <a:latin typeface="Inter Semi Bold" panose="02000703000000020004" pitchFamily="50" charset="0"/>
+                <a:ea typeface="Inter Semi Bold" panose="02000703000000020004" pitchFamily="50" charset="0"/>
+                <a:cs typeface="Inter Semi Bold" panose="02000703000000020004" pitchFamily="50" charset="0"/>
+              </a:rPr>
+            </a:br>
             <a:r>
               <a:rPr lang="ru-RU" dirty="0">
                 <a:solidFill>
